--- a/slides/pptx/week16.pptx
+++ b/slides/pptx/week16.pptx
@@ -773,7 +773,7 @@
           <a:p>
             <a:r>
               <a:rPr lang="en-US" dirty="0"/>
-              <a:t>Run on a timer (15 min/team). "Ungraded" lowers stakes so they expose weak spots now. Insist on a LIVE walkthrough, not slides about it.</a:t>
+              <a:t>Run on a timer (15 min/team). "Ungraded" lowers stakes so they expose weak spots now. Prefer live — it's the better rehearsal — but don't hard-block a team whose sandbox breaks; the worksheet itself allows a recorded fallback for the attack segment, so don't contradict it on stage.</a:t>
             </a:r>
             <a:endParaRPr lang="en-US" dirty="0"/>
           </a:p>
@@ -949,7 +949,7 @@
           <a:p>
             <a:r>
               <a:rPr lang="en-US" dirty="0"/>
-              <a:t>Run the scrimmage (scrimmage.md / item-bank CTF pool) in the exact W19 team format so the final has no surprises. Leaderboard on CTFd. ~2.5 h.</a:t>
+              <a:t>Run the scrimmage (scrimmage.md / item-bank CTF pool) in the exact W19 team format so the final has no surprises — don't drop "cloud" from the category list, it's a real category on the board (misconfig hunt, wk13). The Boss challenge is the one place this CTF ties back to the capstone theme — call it out, it's easy to miss. Leaderboard on CTFd. ~2.5 h.</a:t>
             </a:r>
             <a:endParaRPr lang="en-US" dirty="0"/>
           </a:p>
@@ -1811,7 +1811,9 @@
           <a:ln/>
         </p:spPr>
         <p:txBody>
-          <a:bodyPr wrap="square" lIns="0" tIns="0" rIns="0" bIns="0" rtlCol="0" anchor="t"/>
+          <a:bodyPr wrap="square" lIns="0" tIns="0" rIns="0" bIns="0" rtlCol="0" anchor="t">
+            <a:normAutofit/>
+          </a:bodyPr>
           <a:lstStyle/>
           <a:p>
             <a:pPr marL="342900" indent="-342900">
@@ -2110,7 +2112,9 @@
           <a:ln/>
         </p:spPr>
         <p:txBody>
-          <a:bodyPr wrap="square" lIns="0" tIns="0" rIns="0" bIns="0" rtlCol="0" anchor="t"/>
+          <a:bodyPr wrap="square" lIns="0" tIns="0" rIns="0" bIns="0" rtlCol="0" anchor="t">
+            <a:normAutofit/>
+          </a:bodyPr>
           <a:lstStyle/>
           <a:p>
             <a:pPr marL="342900" indent="-342900">
@@ -2392,11 +2396,11 @@
         <p:spPr>
           <a:xfrm>
             <a:off x="457200" y="1325880"/>
-            <a:ext cx="8229600" cy="1207008"/>
+            <a:ext cx="8229600" cy="1408176"/>
           </a:xfrm>
           <a:prstGeom prst="roundRect">
             <a:avLst>
-              <a:gd name="adj" fmla="val 6061"/>
+              <a:gd name="adj" fmla="val 5195"/>
             </a:avLst>
           </a:prstGeom>
           <a:solidFill>
@@ -2421,7 +2425,7 @@
         <p:spPr>
           <a:xfrm>
             <a:off x="731520" y="1435608"/>
-            <a:ext cx="7680960" cy="987552"/>
+            <a:ext cx="7680960" cy="1188720"/>
           </a:xfrm>
           <a:prstGeom prst="rect">
             <a:avLst/>
@@ -2430,7 +2434,9 @@
           <a:ln/>
         </p:spPr>
         <p:txBody>
-          <a:bodyPr wrap="square" lIns="0" tIns="0" rIns="0" bIns="0" rtlCol="0" anchor="t"/>
+          <a:bodyPr wrap="square" lIns="0" tIns="0" rIns="0" bIns="0" rtlCol="0" anchor="t">
+            <a:normAutofit/>
+          </a:bodyPr>
           <a:lstStyle/>
           <a:p>
             <a:pPr marL="342900" indent="-342900">
@@ -2470,7 +2476,7 @@
                 <a:ea typeface="Calibri" pitchFamily="34" charset="-122"/>
                 <a:cs typeface="Calibri" pitchFamily="34" charset="-120"/>
               </a:rPr>
-              <a:t>Show one full attack→fix walkthrough live</a:t>
+              <a:t>Show one full attack→fix walkthrough — live unless your environment breaks, then a recorded fallback is fine (this is a rehearsal, not the Week 19 format)</a:t>
             </a:r>
             <a:endParaRPr lang="en-US" sz="1400" dirty="0"/>
           </a:p>
@@ -2729,7 +2735,9 @@
           <a:ln/>
         </p:spPr>
         <p:txBody>
-          <a:bodyPr wrap="square" lIns="0" tIns="0" rIns="0" bIns="0" rtlCol="0" anchor="t"/>
+          <a:bodyPr wrap="square" lIns="0" tIns="0" rIns="0" bIns="0" rtlCol="0" anchor="t">
+            <a:normAutofit/>
+          </a:bodyPr>
           <a:lstStyle/>
           <a:p>
             <a:pPr marL="342900" indent="-342900">
@@ -3011,11 +3019,11 @@
         <p:spPr>
           <a:xfrm>
             <a:off x="457200" y="1325880"/>
-            <a:ext cx="8229600" cy="1207008"/>
+            <a:ext cx="8229600" cy="1609344"/>
           </a:xfrm>
           <a:prstGeom prst="roundRect">
             <a:avLst>
-              <a:gd name="adj" fmla="val 6061"/>
+              <a:gd name="adj" fmla="val 4545"/>
             </a:avLst>
           </a:prstGeom>
           <a:solidFill>
@@ -3040,7 +3048,7 @@
         <p:spPr>
           <a:xfrm>
             <a:off x="731520" y="1435608"/>
-            <a:ext cx="7680960" cy="987552"/>
+            <a:ext cx="7680960" cy="1389888"/>
           </a:xfrm>
           <a:prstGeom prst="rect">
             <a:avLst/>
@@ -3049,7 +3057,9 @@
           <a:ln/>
         </p:spPr>
         <p:txBody>
-          <a:bodyPr wrap="square" lIns="0" tIns="0" rIns="0" bIns="0" rtlCol="0" anchor="t"/>
+          <a:bodyPr wrap="square" lIns="0" tIns="0" rIns="0" bIns="0" rtlCol="0" anchor="t">
+            <a:normAutofit/>
+          </a:bodyPr>
           <a:lstStyle/>
           <a:p>
             <a:pPr marL="342900" indent="-342900">
@@ -3068,7 +3078,7 @@
                 <a:ea typeface="Calibri" pitchFamily="34" charset="-122"/>
                 <a:cs typeface="Calibri" pitchFamily="34" charset="-120"/>
               </a:rPr>
-              <a:t>Mixed web / API / supply-chain / LLM / binary</a:t>
+              <a:t>Mixed web / API / binary / supply-chain / cloud / LLM — 9 challenges, 6 categories</a:t>
             </a:r>
             <a:endParaRPr lang="en-US" sz="1400" dirty="0"/>
           </a:p>
@@ -3089,7 +3099,7 @@
                 <a:ea typeface="Calibri" pitchFamily="34" charset="-122"/>
                 <a:cs typeface="Calibri" pitchFamily="34" charset="-120"/>
               </a:rPr>
-              <a:t>Cross-team scrimmage</a:t>
+              <a:t>Boss challenge: chains two bugs on NoteVault itself — your term project's own starter app</a:t>
             </a:r>
             <a:endParaRPr lang="en-US" sz="1400" dirty="0"/>
           </a:p>
@@ -3110,7 +3120,7 @@
                 <a:ea typeface="Calibri" pitchFamily="34" charset="-122"/>
                 <a:cs typeface="Calibri" pitchFamily="34" charset="-120"/>
               </a:rPr>
-              <a:t>Dry run for the Week 19 tournament</a:t>
+              <a:t>Cross-team scrimmage, dry run for the Week 19 tournament</a:t>
             </a:r>
             <a:endParaRPr lang="en-US" sz="1400" dirty="0"/>
           </a:p>
@@ -3348,7 +3358,9 @@
           <a:ln/>
         </p:spPr>
         <p:txBody>
-          <a:bodyPr wrap="square" lIns="0" tIns="0" rIns="0" bIns="0" rtlCol="0" anchor="t"/>
+          <a:bodyPr wrap="square" lIns="0" tIns="0" rIns="0" bIns="0" rtlCol="0" anchor="t">
+            <a:normAutofit/>
+          </a:bodyPr>
           <a:lstStyle/>
           <a:p>
             <a:pPr marL="342900" indent="-342900">

--- a/slides/pptx/week16.pptx
+++ b/slides/pptx/week16.pptx
@@ -13,9 +13,10 @@
     <p:sldId id="261" r:id="rId7"/>
     <p:sldId id="262" r:id="rId8"/>
     <p:sldId id="263" r:id="rId9"/>
+    <p:sldId id="264" r:id="rId10"/>
   </p:sldIdLst>
   <p:notesMasterIdLst>
-    <p:notesMasterId r:id="rId10"/>
+    <p:notesMasterId r:id="rId11"/>
   </p:notesMasterIdLst>
   <p:sldSz cx="9144000" cy="5143500"/>
   <p:notesSz cx="5143500" cy="9144000"/>
@@ -773,7 +774,7 @@
           <a:p>
             <a:r>
               <a:rPr lang="en-US" dirty="0"/>
-              <a:t>Run on a timer (15 min/team). "Ungraded" lowers stakes so they expose weak spots now. Prefer live — it's the better rehearsal — but don't hard-block a team whose sandbox breaks; the worksheet itself allows a recorded fallback for the attack segment, so don't contradict it on stage.</a:t>
+              <a:t>The self-assessment tool for this session: which categories does YOUR capstone actually demonstrate, and which week's lab is the closest precedent to borrow from? The three "deep coverage" rows (A01/A03/A05) had the most lab hours — that's where a team's evidence will be strongest, and a useful nudge for teams still choosing what to build around. ~4 min.</a:t>
             </a:r>
             <a:endParaRPr lang="en-US" dirty="0"/>
           </a:p>
@@ -861,7 +862,7 @@
           <a:p>
             <a:r>
               <a:rPr lang="en-US" dirty="0"/>
-              <a:t>Hand each team this as a checklist to score the team presenting (use scrimmage.md). Peer feedback in writing → the presenting team gets a punch-list. This is the main value of the session.</a:t>
+              <a:t>Run on a timer (15 min/team). "Ungraded" lowers stakes so they expose weak spots now. Prefer live — it's the better rehearsal — but don't hard-block a team whose sandbox breaks; the worksheet itself allows a recorded fallback for the attack segment, so don't contradict it on stage.</a:t>
             </a:r>
             <a:endParaRPr lang="en-US" dirty="0"/>
           </a:p>
@@ -949,7 +950,7 @@
           <a:p>
             <a:r>
               <a:rPr lang="en-US" dirty="0"/>
-              <a:t>Run the scrimmage (scrimmage.md / item-bank CTF pool) in the exact W19 team format so the final has no surprises — don't drop "cloud" from the category list, it's a real category on the board (misconfig hunt, wk13). The Boss challenge is the one place this CTF ties back to the capstone theme — call it out, it's easy to miss. Leaderboard on CTFd. ~2.5 h.</a:t>
+              <a:t>Hand each team this as a checklist to score the team presenting (use scrimmage.md). Peer feedback in writing → the presenting team gets a punch-list. This is the main value of the session.</a:t>
             </a:r>
             <a:endParaRPr lang="en-US" dirty="0"/>
           </a:p>
@@ -1037,7 +1038,7 @@
           <a:p>
             <a:r>
               <a:rPr lang="en-US" dirty="0"/>
-              <a:t>Send them off with a concrete punch-list (the peer feedback). Remind: W19 demo is graded + the final CTF tournament.</a:t>
+              <a:t>Run the scrimmage (scrimmage.md / item-bank CTF pool) in the exact W19 team format so the final has no surprises — don't drop "cloud" from the category list, it's a real category on the board (misconfig hunt, wk13). The Boss challenge is the one place this CTF ties back to the capstone theme — call it out, it's easy to miss. Leaderboard on CTFd. ~2.5 h.</a:t>
             </a:r>
             <a:endParaRPr lang="en-US" dirty="0"/>
           </a:p>
@@ -1125,7 +1126,7 @@
           <a:p>
             <a:r>
               <a:rPr lang="en-US" dirty="0"/>
-              <a:t>Bridge to W17 review. Confirm project repos are runnable before the final.</a:t>
+              <a:t>Send them off with a concrete punch-list (the peer feedback). Remind: W19 demo is graded + the final CTF tournament.</a:t>
             </a:r>
             <a:endParaRPr lang="en-US" dirty="0"/>
           </a:p>
@@ -1149,6 +1150,94 @@
             <a:fld id="{F7021451-1387-4CA6-816F-3879F97B5CBC}" type="slidenum">
               <a:rPr lang="en-US"/>
               <a:t>8</a:t>
+            </a:fld>
+            <a:endParaRPr lang="en-US"/>
+          </a:p>
+        </p:txBody>
+      </p:sp>
+    </p:spTree>
+    <p:extLst>
+      <p:ext uri="{BB962C8B-B14F-4D97-AF65-F5344CB8AC3E}">
+        <p14:creationId xmlns:p14="http://schemas.microsoft.com/office/powerpoint/2010/main" val="1024086991"/>
+      </p:ext>
+    </p:extLst>
+  </p:cSld>
+  <p:clrMapOvr>
+    <a:masterClrMapping/>
+  </p:clrMapOvr>
+</p:notes>
+</file>
+
+<file path=ppt/notesSlides/notesSlide9.xml><?xml version="1.0" encoding="utf-8"?>
+<p:notes xmlns:a="http://schemas.openxmlformats.org/drawingml/2006/main" xmlns:r="http://schemas.openxmlformats.org/officeDocument/2006/relationships" xmlns:p="http://schemas.openxmlformats.org/presentationml/2006/main">
+  <p:cSld>
+    <p:spTree>
+      <p:nvGrpSpPr>
+        <p:cNvPr id="1" name=""/>
+        <p:cNvGrpSpPr/>
+        <p:nvPr/>
+      </p:nvGrpSpPr>
+      <p:grpSpPr>
+        <a:xfrm>
+          <a:off x="0" y="0"/>
+          <a:ext cx="0" cy="0"/>
+          <a:chOff x="0" y="0"/>
+          <a:chExt cx="0" cy="0"/>
+        </a:xfrm>
+      </p:grpSpPr>
+      <p:sp>
+        <p:nvSpPr>
+          <p:cNvPr id="2" name="Slide Image Placeholder 1"/>
+          <p:cNvSpPr>
+            <a:spLocks noGrp="1" noRot="1" noChangeAspect="1"/>
+          </p:cNvSpPr>
+          <p:nvPr>
+            <p:ph type="sldImg"/>
+          </p:nvPr>
+        </p:nvSpPr>
+        <p:spPr/>
+      </p:sp>
+      <p:sp>
+        <p:nvSpPr>
+          <p:cNvPr id="3" name="Notes Placeholder 2"/>
+          <p:cNvSpPr>
+            <a:spLocks noGrp="1"/>
+          </p:cNvSpPr>
+          <p:nvPr>
+            <p:ph type="body" idx="1"/>
+          </p:nvPr>
+        </p:nvSpPr>
+        <p:spPr/>
+        <p:txBody>
+          <a:bodyPr/>
+          <a:lstStyle/>
+          <a:p>
+            <a:r>
+              <a:rPr lang="en-US" dirty="0"/>
+              <a:t>Bridge to W17 review. Confirm project repos are runnable before the final.</a:t>
+            </a:r>
+            <a:endParaRPr lang="en-US" dirty="0"/>
+          </a:p>
+        </p:txBody>
+      </p:sp>
+      <p:sp>
+        <p:nvSpPr>
+          <p:cNvPr id="4" name="Slide Number Placeholder 3"/>
+          <p:cNvSpPr>
+            <a:spLocks noGrp="1"/>
+          </p:cNvSpPr>
+          <p:nvPr>
+            <p:ph type="sldNum" sz="quarter" idx="10"/>
+          </p:nvPr>
+        </p:nvSpPr>
+        <p:spPr/>
+        <p:txBody>
+          <a:bodyPr/>
+          <a:lstStyle/>
+          <a:p>
+            <a:fld id="{F7021451-1387-4CA6-816F-3879F97B5CBC}" type="slidenum">
+              <a:rPr lang="en-US"/>
+              <a:t>9</a:t>
             </a:fld>
             <a:endParaRPr lang="en-US"/>
           </a:p>
@@ -2381,7 +2470,7 @@
                 <a:ea typeface="Arial" pitchFamily="34" charset="-122"/>
                 <a:cs typeface="Arial" pitchFamily="34" charset="-120"/>
               </a:rPr>
-              <a:t>Demo format (today, ungraded)</a:t>
+              <a:t>The whole term, one lookup table</a:t>
             </a:r>
             <a:endParaRPr lang="en-US" sz="2600" dirty="0"/>
           </a:p>
@@ -2389,43 +2478,14 @@
       </p:sp>
       <p:sp>
         <p:nvSpPr>
-          <p:cNvPr id="5" name="Shape 2"/>
+          <p:cNvPr id="5" name="Text 2"/>
           <p:cNvSpPr/>
           <p:nvPr/>
         </p:nvSpPr>
         <p:spPr>
           <a:xfrm>
-            <a:off x="457200" y="1325880"/>
-            <a:ext cx="8229600" cy="1408176"/>
-          </a:xfrm>
-          <a:prstGeom prst="roundRect">
-            <a:avLst>
-              <a:gd name="adj" fmla="val 5195"/>
-            </a:avLst>
-          </a:prstGeom>
-          <a:solidFill>
-            <a:srgbClr val="F1F5F9"/>
-          </a:solidFill>
-          <a:ln/>
-          <a:effectLst>
-            <a:outerShdw sx="100000" sy="100000" kx="0" ky="0" algn="bl" rotWithShape="0" blurRad="76200" dist="25400" dir="5400000">
-              <a:srgbClr val="000000">
-                <a:alpha val="12000"/>
-              </a:srgbClr>
-            </a:outerShdw>
-          </a:effectLst>
-        </p:spPr>
-      </p:sp>
-      <p:sp>
-        <p:nvSpPr>
-          <p:cNvPr id="6" name="Text 3"/>
-          <p:cNvSpPr/>
-          <p:nvPr/>
-        </p:nvSpPr>
-        <p:spPr>
-          <a:xfrm>
-            <a:off x="731520" y="1435608"/>
-            <a:ext cx="7680960" cy="1188720"/>
+            <a:off x="548640" y="1325880"/>
+            <a:ext cx="8046720" cy="2743200"/>
           </a:xfrm>
           <a:prstGeom prst="rect">
             <a:avLst/>
@@ -2439,12 +2499,8 @@
           </a:bodyPr>
           <a:lstStyle/>
           <a:p>
-            <a:pPr marL="342900" indent="-342900">
-              <a:spcAft>
-                <a:spcPts val="600"/>
-              </a:spcAft>
-              <a:buSzPct val="100000"/>
-              <a:buChar char="•"/>
+            <a:pPr indent="0" marL="0">
+              <a:buNone/>
             </a:pPr>
             <a:r>
               <a:rPr lang="en-US" sz="1400" dirty="0">
@@ -2455,57 +2511,15 @@
                 <a:ea typeface="Calibri" pitchFamily="34" charset="-122"/>
                 <a:cs typeface="Calibri" pitchFamily="34" charset="-120"/>
               </a:rPr>
-              <a:t>10-min demo + 5-min Q&amp;A</a:t>
+              <a:t>See diagram: The OWASP Top 10 (2025), each row paired with the week that taught it, the lab file that demonstrated it, and a representative CWE — A01 Broken Access Control (weeks 6, 10, deep coverage), A02 Security Misconfiguration (weeks 13, 2), A03 Software Supply Chain Failures (weeks 12, 15, deep coverage), A04 Cryptographic Failures (week 3), A05 Injection (weeks 4, 5, 2, deep coverage), A06 Insecure Design (week 1), A07 Authentication Failures (week 6), A08 Integrity Failures (week 12), A09 Logging Failures (week 15), A10 Mishandling Exceptional Conditions (week 15) — plus three categories beyond the web Top 10 still graded in the capstone CTF: API1 BOLA (week 10), memory-safety exploitation (week 11), and prompt injection (week 14). (web only)</a:t>
             </a:r>
             <a:endParaRPr lang="en-US" sz="1400" dirty="0"/>
           </a:p>
-          <a:p>
-            <a:pPr marL="342900" indent="-342900">
-              <a:spcAft>
-                <a:spcPts val="600"/>
-              </a:spcAft>
-              <a:buSzPct val="100000"/>
-              <a:buChar char="•"/>
-            </a:pPr>
-            <a:r>
-              <a:rPr lang="en-US" sz="1400" dirty="0">
-                <a:solidFill>
-                  <a:srgbClr val="1F2937"/>
-                </a:solidFill>
-                <a:latin typeface="Calibri" pitchFamily="34" charset="0"/>
-                <a:ea typeface="Calibri" pitchFamily="34" charset="-122"/>
-                <a:cs typeface="Calibri" pitchFamily="34" charset="-120"/>
-              </a:rPr>
-              <a:t>Show one full attack→fix walkthrough — live unless your environment breaks, then a recorded fallback is fine (this is a rehearsal, not the Week 19 format)</a:t>
-            </a:r>
-            <a:endParaRPr lang="en-US" sz="1400" dirty="0"/>
-          </a:p>
-          <a:p>
-            <a:pPr marL="342900" indent="-342900">
-              <a:spcAft>
-                <a:spcPts val="600"/>
-              </a:spcAft>
-              <a:buSzPct val="100000"/>
-              <a:buChar char="•"/>
-            </a:pPr>
-            <a:r>
-              <a:rPr lang="en-US" sz="1400" dirty="0">
-                <a:solidFill>
-                  <a:srgbClr val="1F2937"/>
-                </a:solidFill>
-                <a:latin typeface="Calibri" pitchFamily="34" charset="0"/>
-                <a:ea typeface="Calibri" pitchFamily="34" charset="-122"/>
-                <a:cs typeface="Calibri" pitchFamily="34" charset="-120"/>
-              </a:rPr>
-              <a:t>Get peer feedback before the graded Week 19</a:t>
-            </a:r>
-            <a:endParaRPr lang="en-US" sz="1400" dirty="0"/>
-          </a:p>
-        </p:txBody>
-      </p:sp>
-      <p:sp>
-        <p:nvSpPr>
-          <p:cNvPr id="7" name="Text 4"/>
+        </p:txBody>
+      </p:sp>
+      <p:sp>
+        <p:nvSpPr>
+          <p:cNvPr id="6" name="Text 3"/>
           <p:cNvSpPr/>
           <p:nvPr/>
         </p:nvSpPr>
@@ -2544,7 +2558,7 @@
       </p:sp>
       <p:pic>
         <p:nvPicPr>
-          <p:cNvPr id="8" name="Image 1" descr="/Users/pop7/Library/CloudStorage/OneDrive-MonsterConnectCo.,Ltd/Lecture/KOSEN69 - software-security/slides/pptx/assets/logo-small.png">    </p:cNvPr>
+          <p:cNvPr id="7" name="Image 1" descr="/Users/pop7/Library/CloudStorage/OneDrive-MonsterConnectCo.,Ltd/Lecture/KOSEN69 - software-security/slides/pptx/assets/logo-small.png">    </p:cNvPr>
           <p:cNvPicPr>
             <a:picLocks noChangeAspect="1"/>
           </p:cNvPicPr>
@@ -2682,7 +2696,7 @@
                 <a:ea typeface="Arial" pitchFamily="34" charset="-122"/>
                 <a:cs typeface="Arial" pitchFamily="34" charset="-120"/>
               </a:rPr>
-              <a:t>Peer review rubric</a:t>
+              <a:t>Demo format (today, ungraded)</a:t>
             </a:r>
             <a:endParaRPr lang="en-US" sz="2600" dirty="0"/>
           </a:p>
@@ -2697,11 +2711,11 @@
         <p:spPr>
           <a:xfrm>
             <a:off x="457200" y="1325880"/>
-            <a:ext cx="8229600" cy="1517904"/>
+            <a:ext cx="8229600" cy="1408176"/>
           </a:xfrm>
           <a:prstGeom prst="roundRect">
             <a:avLst>
-              <a:gd name="adj" fmla="val 4819"/>
+              <a:gd name="adj" fmla="val 5195"/>
             </a:avLst>
           </a:prstGeom>
           <a:solidFill>
@@ -2726,7 +2740,7 @@
         <p:spPr>
           <a:xfrm>
             <a:off x="731520" y="1435608"/>
-            <a:ext cx="7680960" cy="1298448"/>
+            <a:ext cx="7680960" cy="1188720"/>
           </a:xfrm>
           <a:prstGeom prst="rect">
             <a:avLst/>
@@ -2756,7 +2770,7 @@
                 <a:ea typeface="Calibri" pitchFamily="34" charset="-122"/>
                 <a:cs typeface="Calibri" pitchFamily="34" charset="-120"/>
               </a:rPr>
-              <a:t>Is the threat model complete?</a:t>
+              <a:t>10-min demo + 5-min Q&amp;A</a:t>
             </a:r>
             <a:endParaRPr lang="en-US" sz="1400" dirty="0"/>
           </a:p>
@@ -2777,7 +2791,7 @@
                 <a:ea typeface="Calibri" pitchFamily="34" charset="-122"/>
                 <a:cs typeface="Calibri" pitchFamily="34" charset="-120"/>
               </a:rPr>
-              <a:t>Are findings CWE/OWASP-mapped &amp; reproduced?</a:t>
+              <a:t>Show one full attack→fix walkthrough — live unless your environment breaks, then a recorded fallback is fine (this is a rehearsal, not the Week 19 format)</a:t>
             </a:r>
             <a:endParaRPr lang="en-US" sz="1400" dirty="0"/>
           </a:p>
@@ -2798,28 +2812,7 @@
                 <a:ea typeface="Calibri" pitchFamily="34" charset="-122"/>
                 <a:cs typeface="Calibri" pitchFamily="34" charset="-120"/>
               </a:rPr>
-              <a:t>Do the fixes actually close the bug?</a:t>
-            </a:r>
-            <a:endParaRPr lang="en-US" sz="1400" dirty="0"/>
-          </a:p>
-          <a:p>
-            <a:pPr marL="342900" indent="-342900">
-              <a:spcAft>
-                <a:spcPts val="600"/>
-              </a:spcAft>
-              <a:buSzPct val="100000"/>
-              <a:buChar char="•"/>
-            </a:pPr>
-            <a:r>
-              <a:rPr lang="en-US" sz="1400" dirty="0">
-                <a:solidFill>
-                  <a:srgbClr val="1F2937"/>
-                </a:solidFill>
-                <a:latin typeface="Calibri" pitchFamily="34" charset="0"/>
-                <a:ea typeface="Calibri" pitchFamily="34" charset="-122"/>
-                <a:cs typeface="Calibri" pitchFamily="34" charset="-120"/>
-              </a:rPr>
-              <a:t>Is the pipeline real (fails on findings)?</a:t>
+              <a:t>Get peer feedback before the graded Week 19</a:t>
             </a:r>
             <a:endParaRPr lang="en-US" sz="1400" dirty="0"/>
           </a:p>
@@ -3004,7 +2997,7 @@
                 <a:ea typeface="Arial" pitchFamily="34" charset="-122"/>
                 <a:cs typeface="Arial" pitchFamily="34" charset="-120"/>
               </a:rPr>
-              <a:t>🏆 Practice CTF</a:t>
+              <a:t>Peer review rubric</a:t>
             </a:r>
             <a:endParaRPr lang="en-US" sz="2600" dirty="0"/>
           </a:p>
@@ -3019,11 +3012,11 @@
         <p:spPr>
           <a:xfrm>
             <a:off x="457200" y="1325880"/>
-            <a:ext cx="8229600" cy="1609344"/>
+            <a:ext cx="8229600" cy="1517904"/>
           </a:xfrm>
           <a:prstGeom prst="roundRect">
             <a:avLst>
-              <a:gd name="adj" fmla="val 4545"/>
+              <a:gd name="adj" fmla="val 4819"/>
             </a:avLst>
           </a:prstGeom>
           <a:solidFill>
@@ -3048,7 +3041,7 @@
         <p:spPr>
           <a:xfrm>
             <a:off x="731520" y="1435608"/>
-            <a:ext cx="7680960" cy="1389888"/>
+            <a:ext cx="7680960" cy="1298448"/>
           </a:xfrm>
           <a:prstGeom prst="rect">
             <a:avLst/>
@@ -3078,7 +3071,7 @@
                 <a:ea typeface="Calibri" pitchFamily="34" charset="-122"/>
                 <a:cs typeface="Calibri" pitchFamily="34" charset="-120"/>
               </a:rPr>
-              <a:t>Mixed web / API / binary / supply-chain / cloud / LLM — 9 challenges, 6 categories</a:t>
+              <a:t>Is the threat model complete?</a:t>
             </a:r>
             <a:endParaRPr lang="en-US" sz="1400" dirty="0"/>
           </a:p>
@@ -3099,7 +3092,7 @@
                 <a:ea typeface="Calibri" pitchFamily="34" charset="-122"/>
                 <a:cs typeface="Calibri" pitchFamily="34" charset="-120"/>
               </a:rPr>
-              <a:t>Boss challenge: chains two bugs on NoteVault itself — your term project's own starter app</a:t>
+              <a:t>Are findings CWE/OWASP-mapped &amp; reproduced?</a:t>
             </a:r>
             <a:endParaRPr lang="en-US" sz="1400" dirty="0"/>
           </a:p>
@@ -3120,7 +3113,28 @@
                 <a:ea typeface="Calibri" pitchFamily="34" charset="-122"/>
                 <a:cs typeface="Calibri" pitchFamily="34" charset="-120"/>
               </a:rPr>
-              <a:t>Cross-team scrimmage, dry run for the Week 19 tournament</a:t>
+              <a:t>Do the fixes actually close the bug?</a:t>
+            </a:r>
+            <a:endParaRPr lang="en-US" sz="1400" dirty="0"/>
+          </a:p>
+          <a:p>
+            <a:pPr marL="342900" indent="-342900">
+              <a:spcAft>
+                <a:spcPts val="600"/>
+              </a:spcAft>
+              <a:buSzPct val="100000"/>
+              <a:buChar char="•"/>
+            </a:pPr>
+            <a:r>
+              <a:rPr lang="en-US" sz="1400" dirty="0">
+                <a:solidFill>
+                  <a:srgbClr val="1F2937"/>
+                </a:solidFill>
+                <a:latin typeface="Calibri" pitchFamily="34" charset="0"/>
+                <a:ea typeface="Calibri" pitchFamily="34" charset="-122"/>
+                <a:cs typeface="Calibri" pitchFamily="34" charset="-120"/>
+              </a:rPr>
+              <a:t>Is the pipeline real (fails on findings)?</a:t>
             </a:r>
             <a:endParaRPr lang="en-US" sz="1400" dirty="0"/>
           </a:p>
@@ -3305,7 +3319,7 @@
                 <a:ea typeface="Arial" pitchFamily="34" charset="-122"/>
                 <a:cs typeface="Arial" pitchFamily="34" charset="-120"/>
               </a:rPr>
-              <a:t>Before Week 19</a:t>
+              <a:t>🏆 Practice CTF</a:t>
             </a:r>
             <a:endParaRPr lang="en-US" sz="2600" dirty="0"/>
           </a:p>
@@ -3320,11 +3334,11 @@
         <p:spPr>
           <a:xfrm>
             <a:off x="457200" y="1325880"/>
-            <a:ext cx="8229600" cy="1207008"/>
+            <a:ext cx="8229600" cy="1609344"/>
           </a:xfrm>
           <a:prstGeom prst="roundRect">
             <a:avLst>
-              <a:gd name="adj" fmla="val 6061"/>
+              <a:gd name="adj" fmla="val 4545"/>
             </a:avLst>
           </a:prstGeom>
           <a:solidFill>
@@ -3349,7 +3363,7 @@
         <p:spPr>
           <a:xfrm>
             <a:off x="731520" y="1435608"/>
-            <a:ext cx="7680960" cy="987552"/>
+            <a:ext cx="7680960" cy="1389888"/>
           </a:xfrm>
           <a:prstGeom prst="rect">
             <a:avLst/>
@@ -3379,7 +3393,7 @@
                 <a:ea typeface="Calibri" pitchFamily="34" charset="-122"/>
                 <a:cs typeface="Calibri" pitchFamily="34" charset="-120"/>
               </a:rPr>
-              <a:t>Fix gaps peers flagged</a:t>
+              <a:t>Mixed web / API / binary / supply-chain / cloud / LLM — 9 challenges, 6 categories</a:t>
             </a:r>
             <a:endParaRPr lang="en-US" sz="1400" dirty="0"/>
           </a:p>
@@ -3400,7 +3414,7 @@
                 <a:ea typeface="Calibri" pitchFamily="34" charset="-122"/>
                 <a:cs typeface="Calibri" pitchFamily="34" charset="-120"/>
               </a:rPr>
-              <a:t>Finalize SBOM + signing + pipeline</a:t>
+              <a:t>Boss challenge: chains two bugs on NoteVault itself — your term project's own starter app</a:t>
             </a:r>
             <a:endParaRPr lang="en-US" sz="1400" dirty="0"/>
           </a:p>
@@ -3421,7 +3435,7 @@
                 <a:ea typeface="Calibri" pitchFamily="34" charset="-122"/>
                 <a:cs typeface="Calibri" pitchFamily="34" charset="-120"/>
               </a:rPr>
-              <a:t>Rehearse the demo</a:t>
+              <a:t>Cross-team scrimmage, dry run for the Week 19 tournament</a:t>
             </a:r>
             <a:endParaRPr lang="en-US" sz="1400" dirty="0"/>
           </a:p>
@@ -3501,6 +3515,307 @@
 <file path=ppt/slides/slide8.xml><?xml version="1.0" encoding="utf-8"?>
 <p:sld xmlns:a="http://schemas.openxmlformats.org/drawingml/2006/main" xmlns:r="http://schemas.openxmlformats.org/officeDocument/2006/relationships" xmlns:p="http://schemas.openxmlformats.org/presentationml/2006/main">
   <p:cSld name="Slide 8">
+    <p:bg>
+      <p:bgPr>
+        <a:solidFill>
+          <a:srgbClr val="FFFFFF"/>
+        </a:solidFill>
+      </p:bgPr>
+    </p:bg>
+    <p:spTree>
+      <p:nvGrpSpPr>
+        <p:cNvPr id="1" name=""/>
+        <p:cNvGrpSpPr/>
+        <p:nvPr/>
+      </p:nvGrpSpPr>
+      <p:grpSpPr>
+        <a:xfrm>
+          <a:off x="0" y="0"/>
+          <a:ext cx="0" cy="0"/>
+          <a:chOff x="0" y="0"/>
+          <a:chExt cx="0" cy="0"/>
+        </a:xfrm>
+      </p:grpSpPr>
+      <p:sp>
+        <p:nvSpPr>
+          <p:cNvPr id="2" name="Shape 0"/>
+          <p:cNvSpPr/>
+          <p:nvPr/>
+        </p:nvSpPr>
+        <p:spPr>
+          <a:xfrm>
+            <a:off x="457200" y="384048"/>
+            <a:ext cx="530352" cy="530352"/>
+          </a:xfrm>
+          <a:prstGeom prst="ellipse">
+            <a:avLst/>
+          </a:prstGeom>
+          <a:solidFill>
+            <a:srgbClr val="E35205"/>
+          </a:solidFill>
+          <a:ln/>
+          <a:effectLst>
+            <a:outerShdw sx="100000" sy="100000" kx="0" ky="0" algn="bl" rotWithShape="0" blurRad="76200" dist="25400" dir="5400000">
+              <a:srgbClr val="000000">
+                <a:alpha val="12000"/>
+              </a:srgbClr>
+            </a:outerShdw>
+          </a:effectLst>
+        </p:spPr>
+      </p:sp>
+      <p:pic>
+        <p:nvPicPr>
+          <p:cNvPr id="3" name="Image 0" descr="preencoded.png">    </p:cNvPr>
+          <p:cNvPicPr>
+            <a:picLocks noChangeAspect="1"/>
+          </p:cNvPicPr>
+          <p:nvPr/>
+        </p:nvPicPr>
+        <p:blipFill>
+          <a:blip r:embed="rId1"/>
+          <a:stretch>
+            <a:fillRect/>
+          </a:stretch>
+        </p:blipFill>
+        <p:spPr>
+          <a:xfrm>
+            <a:off x="594360" y="521208"/>
+            <a:ext cx="256032" cy="256032"/>
+          </a:xfrm>
+          <a:prstGeom prst="rect">
+            <a:avLst/>
+          </a:prstGeom>
+        </p:spPr>
+      </p:pic>
+      <p:sp>
+        <p:nvSpPr>
+          <p:cNvPr id="4" name="Text 1"/>
+          <p:cNvSpPr/>
+          <p:nvPr/>
+        </p:nvSpPr>
+        <p:spPr>
+          <a:xfrm>
+            <a:off x="1143000" y="329184"/>
+            <a:ext cx="7498080" cy="603504"/>
+          </a:xfrm>
+          <a:prstGeom prst="rect">
+            <a:avLst/>
+          </a:prstGeom>
+          <a:noFill/>
+          <a:ln/>
+        </p:spPr>
+        <p:txBody>
+          <a:bodyPr wrap="square" lIns="0" tIns="0" rIns="0" bIns="0" rtlCol="0" anchor="ctr"/>
+          <a:lstStyle/>
+          <a:p>
+            <a:pPr indent="0" marL="0">
+              <a:buNone/>
+            </a:pPr>
+            <a:r>
+              <a:rPr lang="en-US" sz="2600" b="1" dirty="0">
+                <a:solidFill>
+                  <a:srgbClr val="1F2937"/>
+                </a:solidFill>
+                <a:latin typeface="Arial" pitchFamily="34" charset="0"/>
+                <a:ea typeface="Arial" pitchFamily="34" charset="-122"/>
+                <a:cs typeface="Arial" pitchFamily="34" charset="-120"/>
+              </a:rPr>
+              <a:t>Before Week 19</a:t>
+            </a:r>
+            <a:endParaRPr lang="en-US" sz="2600" dirty="0"/>
+          </a:p>
+        </p:txBody>
+      </p:sp>
+      <p:sp>
+        <p:nvSpPr>
+          <p:cNvPr id="5" name="Shape 2"/>
+          <p:cNvSpPr/>
+          <p:nvPr/>
+        </p:nvSpPr>
+        <p:spPr>
+          <a:xfrm>
+            <a:off x="457200" y="1325880"/>
+            <a:ext cx="8229600" cy="1207008"/>
+          </a:xfrm>
+          <a:prstGeom prst="roundRect">
+            <a:avLst>
+              <a:gd name="adj" fmla="val 6061"/>
+            </a:avLst>
+          </a:prstGeom>
+          <a:solidFill>
+            <a:srgbClr val="F1F5F9"/>
+          </a:solidFill>
+          <a:ln/>
+          <a:effectLst>
+            <a:outerShdw sx="100000" sy="100000" kx="0" ky="0" algn="bl" rotWithShape="0" blurRad="76200" dist="25400" dir="5400000">
+              <a:srgbClr val="000000">
+                <a:alpha val="12000"/>
+              </a:srgbClr>
+            </a:outerShdw>
+          </a:effectLst>
+        </p:spPr>
+      </p:sp>
+      <p:sp>
+        <p:nvSpPr>
+          <p:cNvPr id="6" name="Text 3"/>
+          <p:cNvSpPr/>
+          <p:nvPr/>
+        </p:nvSpPr>
+        <p:spPr>
+          <a:xfrm>
+            <a:off x="731520" y="1435608"/>
+            <a:ext cx="7680960" cy="987552"/>
+          </a:xfrm>
+          <a:prstGeom prst="rect">
+            <a:avLst/>
+          </a:prstGeom>
+          <a:noFill/>
+          <a:ln/>
+        </p:spPr>
+        <p:txBody>
+          <a:bodyPr wrap="square" lIns="0" tIns="0" rIns="0" bIns="0" rtlCol="0" anchor="t">
+            <a:normAutofit/>
+          </a:bodyPr>
+          <a:lstStyle/>
+          <a:p>
+            <a:pPr marL="342900" indent="-342900">
+              <a:spcAft>
+                <a:spcPts val="600"/>
+              </a:spcAft>
+              <a:buSzPct val="100000"/>
+              <a:buChar char="•"/>
+            </a:pPr>
+            <a:r>
+              <a:rPr lang="en-US" sz="1400" dirty="0">
+                <a:solidFill>
+                  <a:srgbClr val="1F2937"/>
+                </a:solidFill>
+                <a:latin typeface="Calibri" pitchFamily="34" charset="0"/>
+                <a:ea typeface="Calibri" pitchFamily="34" charset="-122"/>
+                <a:cs typeface="Calibri" pitchFamily="34" charset="-120"/>
+              </a:rPr>
+              <a:t>Fix gaps peers flagged</a:t>
+            </a:r>
+            <a:endParaRPr lang="en-US" sz="1400" dirty="0"/>
+          </a:p>
+          <a:p>
+            <a:pPr marL="342900" indent="-342900">
+              <a:spcAft>
+                <a:spcPts val="600"/>
+              </a:spcAft>
+              <a:buSzPct val="100000"/>
+              <a:buChar char="•"/>
+            </a:pPr>
+            <a:r>
+              <a:rPr lang="en-US" sz="1400" dirty="0">
+                <a:solidFill>
+                  <a:srgbClr val="1F2937"/>
+                </a:solidFill>
+                <a:latin typeface="Calibri" pitchFamily="34" charset="0"/>
+                <a:ea typeface="Calibri" pitchFamily="34" charset="-122"/>
+                <a:cs typeface="Calibri" pitchFamily="34" charset="-120"/>
+              </a:rPr>
+              <a:t>Finalize SBOM + signing + pipeline</a:t>
+            </a:r>
+            <a:endParaRPr lang="en-US" sz="1400" dirty="0"/>
+          </a:p>
+          <a:p>
+            <a:pPr marL="342900" indent="-342900">
+              <a:spcAft>
+                <a:spcPts val="600"/>
+              </a:spcAft>
+              <a:buSzPct val="100000"/>
+              <a:buChar char="•"/>
+            </a:pPr>
+            <a:r>
+              <a:rPr lang="en-US" sz="1400" dirty="0">
+                <a:solidFill>
+                  <a:srgbClr val="1F2937"/>
+                </a:solidFill>
+                <a:latin typeface="Calibri" pitchFamily="34" charset="0"/>
+                <a:ea typeface="Calibri" pitchFamily="34" charset="-122"/>
+                <a:cs typeface="Calibri" pitchFamily="34" charset="-120"/>
+              </a:rPr>
+              <a:t>Rehearse the demo</a:t>
+            </a:r>
+            <a:endParaRPr lang="en-US" sz="1400" dirty="0"/>
+          </a:p>
+        </p:txBody>
+      </p:sp>
+      <p:sp>
+        <p:nvSpPr>
+          <p:cNvPr id="7" name="Text 4"/>
+          <p:cNvSpPr/>
+          <p:nvPr/>
+        </p:nvSpPr>
+        <p:spPr>
+          <a:xfrm>
+            <a:off x="457200" y="4800600"/>
+            <a:ext cx="6949440" cy="274320"/>
+          </a:xfrm>
+          <a:prstGeom prst="rect">
+            <a:avLst/>
+          </a:prstGeom>
+          <a:noFill/>
+          <a:ln/>
+        </p:spPr>
+        <p:txBody>
+          <a:bodyPr wrap="square" lIns="0" tIns="0" rIns="0" bIns="0" rtlCol="0" anchor="ctr"/>
+          <a:lstStyle/>
+          <a:p>
+            <a:pPr indent="0" marL="0">
+              <a:buNone/>
+            </a:pPr>
+            <a:r>
+              <a:rPr lang="en-US" sz="900" dirty="0">
+                <a:solidFill>
+                  <a:srgbClr val="64748B"/>
+                </a:solidFill>
+                <a:latin typeface="Calibri" pitchFamily="34" charset="0"/>
+                <a:ea typeface="Calibri" pitchFamily="34" charset="-122"/>
+                <a:cs typeface="Calibri" pitchFamily="34" charset="-120"/>
+              </a:rPr>
+              <a:t>Software Security · Week 16</a:t>
+            </a:r>
+            <a:endParaRPr lang="en-US" sz="900" dirty="0"/>
+          </a:p>
+        </p:txBody>
+      </p:sp>
+      <p:pic>
+        <p:nvPicPr>
+          <p:cNvPr id="8" name="Image 1" descr="/Users/pop7/Library/CloudStorage/OneDrive-MonsterConnectCo.,Ltd/Lecture/KOSEN69 - software-security/slides/pptx/assets/logo-small.png">    </p:cNvPr>
+          <p:cNvPicPr>
+            <a:picLocks noChangeAspect="1"/>
+          </p:cNvPicPr>
+          <p:nvPr/>
+        </p:nvPicPr>
+        <p:blipFill>
+          <a:blip r:embed="rId2"/>
+          <a:stretch>
+            <a:fillRect/>
+          </a:stretch>
+        </p:blipFill>
+        <p:spPr>
+          <a:xfrm>
+            <a:off x="7882128" y="4700016"/>
+            <a:ext cx="768096" cy="356616"/>
+          </a:xfrm>
+          <a:prstGeom prst="rect">
+            <a:avLst/>
+          </a:prstGeom>
+        </p:spPr>
+      </p:pic>
+    </p:spTree>
+  </p:cSld>
+  <p:clrMapOvr>
+    <a:masterClrMapping/>
+  </p:clrMapOvr>
+</p:sld>
+</file>
+
+<file path=ppt/slides/slide9.xml><?xml version="1.0" encoding="utf-8"?>
+<p:sld xmlns:a="http://schemas.openxmlformats.org/drawingml/2006/main" xmlns:r="http://schemas.openxmlformats.org/officeDocument/2006/relationships" xmlns:p="http://schemas.openxmlformats.org/presentationml/2006/main">
+  <p:cSld name="Slide 9">
     <p:bg>
       <p:bgPr>
         <a:solidFill>
